--- a/PPT-version/AI-Governance/AI-Governance-讲义.pptx
+++ b/PPT-version/AI-Governance/AI-Governance-讲义.pptx
@@ -5832,7 +5832,7 @@
         </p:nvGraphicFramePr>
         <p:xfrm>
           <a:off x="566928" y="1874519"/>
-          <a:ext cx="11057837" cy="1828800"/>
+          <a:ext cx="11057838" cy="1828800"/>
         </p:xfrm>
         <a:graphic>
           <a:graphicData uri="http://schemas.openxmlformats.org/drawingml/2006/table">
@@ -5841,11 +5841,11 @@
                 <a:tableStyleId>{5C22544A-7EE6-4342-B048-85BDC9FD1C3A}</a:tableStyleId>
               </a:tblPr>
               <a:tblGrid>
-                <a:gridCol w="1871326"/>
-                <a:gridCol w="2211567"/>
-                <a:gridCol w="2381688"/>
-                <a:gridCol w="2296628"/>
-                <a:gridCol w="2296628"/>
+                <a:gridCol w="1871335"/>
+                <a:gridCol w="2211586"/>
+                <a:gridCol w="2381665"/>
+                <a:gridCol w="2296626"/>
+                <a:gridCol w="2296626"/>
               </a:tblGrid>
               <a:tr h="365760">
                 <a:tc>
@@ -6445,7 +6445,7 @@
                 </a:solidFill>
                 <a:latin typeface="Calibri"/>
               </a:rPr>
-              <a:t>同类可选（多厂商，非绑定）：发现—Google Cloud Dataplex、ServiceNow AI Control Tower；记录—SageMaker Model Registry 与 Model Cards、Microsoft Foundry；采集—Azure Policy 加 Purview、GCP Security Command Center；留存—三云对象存储都支持不可变。服务名与形态按 2026-08-02 核实；AWS Audit Manager 已转维护模式、2026-04-30 起不对新账号开放，官方指向 AWS Config——证据链别绑死单一产品。</a:t>
+              <a:t>同类可选（多厂商，非绑定）：发现—Google Cloud Knowledge Catalog、ServiceNow AI Control Tower（MCP 服务器自 Q1 2026 起纳入受管资产）；记录—SageMaker Model Registry 与 Model Cards、Microsoft Foundry；采集—Azure Policy 加 Purview、GCP Security Command Center；留存—三云对象存储都支持不可变。服务名与形态按 2026-08-02 核实；AWS Audit Manager 已转维护模式、2026-04-30 起不对新账号开放，官方指向 AWS Config——证据链别绑死单一产品。</a:t>
             </a:r>
           </a:p>
         </p:txBody>
@@ -8016,7 +8016,7 @@
         </p:nvGraphicFramePr>
         <p:xfrm>
           <a:off x="566928" y="1874519"/>
-          <a:ext cx="11057837" cy="2194560"/>
+          <a:ext cx="11057838" cy="2194560"/>
         </p:xfrm>
         <a:graphic>
           <a:graphicData uri="http://schemas.openxmlformats.org/drawingml/2006/table">
@@ -8025,9 +8025,9 @@
                 <a:tableStyleId>{5C22544A-7EE6-4342-B048-85BDC9FD1C3A}</a:tableStyleId>
               </a:tblPr>
               <a:tblGrid>
-                <a:gridCol w="3062170"/>
-                <a:gridCol w="3912773"/>
-                <a:gridCol w="4082894"/>
+                <a:gridCol w="3062142"/>
+                <a:gridCol w="3912809"/>
+                <a:gridCol w="4082887"/>
               </a:tblGrid>
               <a:tr h="365760">
                 <a:tc>
@@ -8894,9 +8894,9 @@
                 <a:tableStyleId>{5C22544A-7EE6-4342-B048-85BDC9FD1C3A}</a:tableStyleId>
               </a:tblPr>
               <a:tblGrid>
-                <a:gridCol w="3742653"/>
-                <a:gridCol w="3742653"/>
-                <a:gridCol w="3572532"/>
+                <a:gridCol w="3742639"/>
+                <a:gridCol w="3742639"/>
+                <a:gridCol w="3572560"/>
               </a:tblGrid>
               <a:tr h="365760">
                 <a:tc>
@@ -9474,10 +9474,10 @@
                 <a:tableStyleId>{5C22544A-7EE6-4342-B048-85BDC9FD1C3A}</a:tableStyleId>
               </a:tblPr>
               <a:tblGrid>
-                <a:gridCol w="2041447"/>
-                <a:gridCol w="2892050"/>
-                <a:gridCol w="3062170"/>
-                <a:gridCol w="3062170"/>
+                <a:gridCol w="2041489"/>
+                <a:gridCol w="2892064"/>
+                <a:gridCol w="3062142"/>
+                <a:gridCol w="3062142"/>
               </a:tblGrid>
               <a:tr h="365760">
                 <a:tc>
@@ -11377,9 +11377,9 @@
                 <a:tableStyleId>{5C22544A-7EE6-4342-B048-85BDC9FD1C3A}</a:tableStyleId>
               </a:tblPr>
               <a:tblGrid>
-                <a:gridCol w="2395865"/>
-                <a:gridCol w="2764459"/>
-                <a:gridCol w="5897514"/>
+                <a:gridCol w="2395839"/>
+                <a:gridCol w="2764436"/>
+                <a:gridCol w="5897563"/>
               </a:tblGrid>
               <a:tr h="365760">
                 <a:tc>
@@ -12493,8 +12493,8 @@
                 <a:tableStyleId>{5C22544A-7EE6-4342-B048-85BDC9FD1C3A}</a:tableStyleId>
               </a:tblPr>
               <a:tblGrid>
-                <a:gridCol w="3133054"/>
-                <a:gridCol w="7924784"/>
+                <a:gridCol w="3133034"/>
+                <a:gridCol w="7924804"/>
               </a:tblGrid>
               <a:tr h="365760">
                 <a:tc>
@@ -14479,9 +14479,9 @@
                 <a:tableStyleId>{5C22544A-7EE6-4342-B048-85BDC9FD1C3A}</a:tableStyleId>
               </a:tblPr>
               <a:tblGrid>
-                <a:gridCol w="1701206"/>
-                <a:gridCol w="4593256"/>
-                <a:gridCol w="4763376"/>
+                <a:gridCol w="1701241"/>
+                <a:gridCol w="4593214"/>
+                <a:gridCol w="4763383"/>
               </a:tblGrid>
               <a:tr h="365760">
                 <a:tc>
@@ -16516,10 +16516,10 @@
                 <a:tableStyleId>{5C22544A-7EE6-4342-B048-85BDC9FD1C3A}</a:tableStyleId>
               </a:tblPr>
               <a:tblGrid>
-                <a:gridCol w="1871326"/>
-                <a:gridCol w="2381688"/>
-                <a:gridCol w="3402412"/>
-                <a:gridCol w="3402412"/>
+                <a:gridCol w="1871335"/>
+                <a:gridCol w="2381665"/>
+                <a:gridCol w="3402419"/>
+                <a:gridCol w="3402419"/>
               </a:tblGrid>
               <a:tr h="365760">
                 <a:tc>
@@ -17666,11 +17666,11 @@
                 <a:tableStyleId>{5C22544A-7EE6-4342-B048-85BDC9FD1C3A}</a:tableStyleId>
               </a:tblPr>
               <a:tblGrid>
-                <a:gridCol w="1701206"/>
-                <a:gridCol w="2721929"/>
+                <a:gridCol w="1701241"/>
+                <a:gridCol w="2721894"/>
                 <a:gridCol w="2211567"/>
-                <a:gridCol w="2126507"/>
-                <a:gridCol w="2296628"/>
+                <a:gridCol w="2126528"/>
+                <a:gridCol w="2296607"/>
               </a:tblGrid>
               <a:tr h="365760">
                 <a:tc>
@@ -18270,7 +18270,7 @@
                 </a:solidFill>
                 <a:latin typeface="Calibri"/>
               </a:rPr>
-              <a:t>同一环节给多厂商代表选项，不绑死单一供应商；只列有真实关联的环节。列宽放不下的同类产品：第 1 行还有 Purview DSPM for AI（覆盖第三方 AI 站点，需开按量计费，多数能力依赖浏览器扩展与设备接入），第 2 行还有 Azure AI Foundry。缩写：SCC，Security Command Center；AI-SPM，AI Security Posture Management；DSPM，Data Security Posture Management。第 1 行这批产品，Security 册第 7 章已按安全态势讲过一遍，本册只取它一件事——把扫出来的资产喂进用途登记表；谷歌文档写明影子 AI 资源不在控制台的发现范围，浏览器里那部分得靠别的路子。选型提醒：AWS Audit Manager 官方文档页顶已公告不再向新客户开放（2026-08-02 核实），别写进新方案；它的生成式 AI 最佳实践框架 v2 共 110 项控制（72 自动 + 38 手动），覆盖 Bedrock 与 SageMaker AI。服务能力以各云当期文档为准。</a:t>
+              <a:t>同一环节给多厂商代表选项，不绑死单一供应商；只列有真实关联的环节。列宽放不下的同类产品：第 1 行还有 Purview DSPM for AI（覆盖第三方 AI 站点，需开按量计费，多数能力依赖浏览器扩展与设备接入），第 2 行还有 Azure AI Foundry。缩写：SCC，Security Command Center；AI-SPM，AI Security Posture Management；DSPM，Data Security Posture Management。第 1 行这批产品，Security 册第 7 章已按安全态势讲过一遍，本册只取它一件事——把扫出来的资产喂进用途登记表；谷歌文档写明 AI Protection 在 Standard/Premium/Enterprise 三层级可用（Enterprise 层级 2027-05-21 停用），Assets 页可盘点模型、数据源、端点、管线、Agent、Notebook 与 MCP 服务器；影子 AI 发现另靠 Defender for Cloud Apps 组合。选型提醒：AWS Audit Manager 官方文档页顶已公告不再向新客户开放（2026-08-02 核实），别写进新方案；它的生成式 AI 最佳实践框架 v2 共 110 项控制（72 自动 + 38 手动），覆盖 Bedrock 与 SageMaker AI。服务能力以各云当期文档为准。</a:t>
             </a:r>
           </a:p>
         </p:txBody>
@@ -21021,7 +21021,7 @@
         </p:nvGraphicFramePr>
         <p:xfrm>
           <a:off x="566928" y="1874519"/>
-          <a:ext cx="11057838" cy="1828800"/>
+          <a:ext cx="11057839" cy="1828800"/>
         </p:xfrm>
         <a:graphic>
           <a:graphicData uri="http://schemas.openxmlformats.org/drawingml/2006/table">
@@ -21030,9 +21030,9 @@
                 <a:tableStyleId>{5C22544A-7EE6-4342-B048-85BDC9FD1C3A}</a:tableStyleId>
               </a:tblPr>
               <a:tblGrid>
-                <a:gridCol w="1871326"/>
-                <a:gridCol w="4593256"/>
-                <a:gridCol w="4593256"/>
+                <a:gridCol w="1871335"/>
+                <a:gridCol w="4593252"/>
+                <a:gridCol w="4593252"/>
               </a:tblGrid>
               <a:tr h="365760">
                 <a:tc>
@@ -23027,8 +23027,8 @@
               </a:tblPr>
               <a:tblGrid>
                 <a:gridCol w="2211567"/>
-                <a:gridCol w="3742653"/>
-                <a:gridCol w="5103618"/>
+                <a:gridCol w="3742639"/>
+                <a:gridCol w="5103632"/>
               </a:tblGrid>
               <a:tr h="365760">
                 <a:tc>
@@ -25752,8 +25752,8 @@
                 <a:tableStyleId>{5C22544A-7EE6-4342-B048-85BDC9FD1C3A}</a:tableStyleId>
               </a:tblPr>
               <a:tblGrid>
-                <a:gridCol w="2041447"/>
-                <a:gridCol w="4593256"/>
+                <a:gridCol w="2041489"/>
+                <a:gridCol w="4593214"/>
                 <a:gridCol w="4423135"/>
               </a:tblGrid>
               <a:tr h="365760">
@@ -29502,10 +29502,10 @@
                 <a:tableStyleId>{5C22544A-7EE6-4342-B048-85BDC9FD1C3A}</a:tableStyleId>
               </a:tblPr>
               <a:tblGrid>
-                <a:gridCol w="1531085"/>
-                <a:gridCol w="2892050"/>
-                <a:gridCol w="3572532"/>
-                <a:gridCol w="3062170"/>
+                <a:gridCol w="1531071"/>
+                <a:gridCol w="2892064"/>
+                <a:gridCol w="3572560"/>
+                <a:gridCol w="3062142"/>
               </a:tblGrid>
               <a:tr h="365760">
                 <a:tc>
@@ -32807,10 +32807,10 @@
                 <a:tableStyleId>{5C22544A-7EE6-4342-B048-85BDC9FD1C3A}</a:tableStyleId>
               </a:tblPr>
               <a:tblGrid>
-                <a:gridCol w="1871326"/>
-                <a:gridCol w="3062170"/>
-                <a:gridCol w="2892050"/>
-                <a:gridCol w="3232291"/>
+                <a:gridCol w="1871319"/>
+                <a:gridCol w="3062142"/>
+                <a:gridCol w="2892064"/>
+                <a:gridCol w="3232312"/>
               </a:tblGrid>
               <a:tr h="365760">
                 <a:tc>
@@ -36120,7 +36120,7 @@
         </p:nvGraphicFramePr>
         <p:xfrm>
           <a:off x="566928" y="1874519"/>
-          <a:ext cx="11057838" cy="2560320"/>
+          <a:ext cx="11057837" cy="2560320"/>
         </p:xfrm>
         <a:graphic>
           <a:graphicData uri="http://schemas.openxmlformats.org/drawingml/2006/table">
@@ -36129,10 +36129,10 @@
                 <a:tableStyleId>{5C22544A-7EE6-4342-B048-85BDC9FD1C3A}</a:tableStyleId>
               </a:tblPr>
               <a:tblGrid>
-                <a:gridCol w="2041447"/>
-                <a:gridCol w="3402412"/>
-                <a:gridCol w="1871326"/>
-                <a:gridCol w="3742653"/>
+                <a:gridCol w="2041489"/>
+                <a:gridCol w="3402390"/>
+                <a:gridCol w="1871319"/>
+                <a:gridCol w="3742639"/>
               </a:tblGrid>
               <a:tr h="365760">
                 <a:tc>
@@ -39889,11 +39889,11 @@
                 <a:tableStyleId>{5C22544A-7EE6-4342-B048-85BDC9FD1C3A}</a:tableStyleId>
               </a:tblPr>
               <a:tblGrid>
-                <a:gridCol w="1701206"/>
-                <a:gridCol w="2721929"/>
+                <a:gridCol w="1701241"/>
+                <a:gridCol w="2721894"/>
                 <a:gridCol w="2211567"/>
-                <a:gridCol w="2126507"/>
-                <a:gridCol w="2296628"/>
+                <a:gridCol w="2126528"/>
+                <a:gridCol w="2296607"/>
               </a:tblGrid>
               <a:tr h="365760">
                 <a:tc>
@@ -42742,7 +42742,7 @@
         </p:nvGraphicFramePr>
         <p:xfrm>
           <a:off x="566928" y="1874519"/>
-          <a:ext cx="11057837" cy="2560320"/>
+          <a:ext cx="11057838" cy="2560320"/>
         </p:xfrm>
         <a:graphic>
           <a:graphicData uri="http://schemas.openxmlformats.org/drawingml/2006/table">
@@ -42751,10 +42751,10 @@
                 <a:tableStyleId>{5C22544A-7EE6-4342-B048-85BDC9FD1C3A}</a:tableStyleId>
               </a:tblPr>
               <a:tblGrid>
-                <a:gridCol w="2211567"/>
-                <a:gridCol w="3062170"/>
-                <a:gridCol w="3402412"/>
-                <a:gridCol w="2381688"/>
+                <a:gridCol w="2211586"/>
+                <a:gridCol w="3062168"/>
+                <a:gridCol w="3402419"/>
+                <a:gridCol w="2381665"/>
               </a:tblGrid>
               <a:tr h="365760">
                 <a:tc>
@@ -43622,10 +43622,10 @@
                 <a:tableStyleId>{5C22544A-7EE6-4342-B048-85BDC9FD1C3A}</a:tableStyleId>
               </a:tblPr>
               <a:tblGrid>
-                <a:gridCol w="1360964"/>
-                <a:gridCol w="3232291"/>
-                <a:gridCol w="2892050"/>
-                <a:gridCol w="3572532"/>
+                <a:gridCol w="1360981"/>
+                <a:gridCol w="3232285"/>
+                <a:gridCol w="2892040"/>
+                <a:gridCol w="3572531"/>
               </a:tblGrid>
               <a:tr h="365760">
                 <a:tc>
@@ -48833,10 +48833,10 @@
                 <a:tableStyleId>{5C22544A-7EE6-4342-B048-85BDC9FD1C3A}</a:tableStyleId>
               </a:tblPr>
               <a:tblGrid>
-                <a:gridCol w="2381688"/>
-                <a:gridCol w="1871326"/>
-                <a:gridCol w="3317351"/>
-                <a:gridCol w="3487472"/>
+                <a:gridCol w="2381665"/>
+                <a:gridCol w="1871335"/>
+                <a:gridCol w="3317379"/>
+                <a:gridCol w="3487458"/>
               </a:tblGrid>
               <a:tr h="365760">
                 <a:tc>
@@ -50073,10 +50073,10 @@
                 <a:tableStyleId>{5C22544A-7EE6-4342-B048-85BDC9FD1C3A}</a:tableStyleId>
               </a:tblPr>
               <a:tblGrid>
-                <a:gridCol w="1701206"/>
-                <a:gridCol w="3912773"/>
-                <a:gridCol w="2211567"/>
-                <a:gridCol w="3232291"/>
+                <a:gridCol w="1701227"/>
+                <a:gridCol w="3912776"/>
+                <a:gridCol w="2211549"/>
+                <a:gridCol w="3232285"/>
               </a:tblGrid>
               <a:tr h="365760">
                 <a:tc>
@@ -50665,7 +50665,7 @@
         </p:nvGraphicFramePr>
         <p:xfrm>
           <a:off x="566928" y="1874519"/>
-          <a:ext cx="11057838" cy="1828800"/>
+          <a:ext cx="11057837" cy="1828800"/>
         </p:xfrm>
         <a:graphic>
           <a:graphicData uri="http://schemas.openxmlformats.org/drawingml/2006/table">
@@ -50674,10 +50674,10 @@
                 <a:tableStyleId>{5C22544A-7EE6-4342-B048-85BDC9FD1C3A}</a:tableStyleId>
               </a:tblPr>
               <a:tblGrid>
-                <a:gridCol w="2041447"/>
-                <a:gridCol w="2721929"/>
-                <a:gridCol w="2892050"/>
-                <a:gridCol w="3402412"/>
+                <a:gridCol w="2041489"/>
+                <a:gridCol w="2721894"/>
+                <a:gridCol w="2892064"/>
+                <a:gridCol w="3402390"/>
               </a:tblGrid>
               <a:tr h="365760">
                 <a:tc>
